--- a/Present.pptx
+++ b/Present.pptx
@@ -107,6 +107,11 @@
       </a:defRPr>
     </a:lvl9pPr>
   </p:defaultTextStyle>
+  <p:extLst>
+    <p:ext uri="{EFAFB233-063F-42B5-8137-9DF3F51BA10A}">
+      <p15:sldGuideLst xmlns:p15="http://schemas.microsoft.com/office/powerpoint/2012/main"/>
+    </p:ext>
+  </p:extLst>
 </p:presentation>
 </file>
 
@@ -115,7 +120,7 @@
   <pc:docChgLst>
     <pc:chgData name="Riabchynskyi Mykyta" userId="a582416d15533f1d" providerId="LiveId" clId="{13F68837-DDAE-4686-9A2C-546EB82ECD5E}"/>
     <pc:docChg chg="custSel addSld modSld sldOrd">
-      <pc:chgData name="Riabchynskyi Mykyta" userId="a582416d15533f1d" providerId="LiveId" clId="{13F68837-DDAE-4686-9A2C-546EB82ECD5E}" dt="2026-04-16T11:03:36.428" v="742" actId="20577"/>
+      <pc:chgData name="Riabchynskyi Mykyta" userId="a582416d15533f1d" providerId="LiveId" clId="{13F68837-DDAE-4686-9A2C-546EB82ECD5E}" dt="2026-04-16T11:11:17.068" v="743" actId="313"/>
       <pc:docMkLst>
         <pc:docMk/>
       </pc:docMkLst>
@@ -143,11 +148,19 @@
         </pc:spChg>
       </pc:sldChg>
       <pc:sldChg chg="modSp mod ord">
-        <pc:chgData name="Riabchynskyi Mykyta" userId="a582416d15533f1d" providerId="LiveId" clId="{13F68837-DDAE-4686-9A2C-546EB82ECD5E}" dt="2026-04-16T10:44:28.793" v="108" actId="20577"/>
+        <pc:chgData name="Riabchynskyi Mykyta" userId="a582416d15533f1d" providerId="LiveId" clId="{13F68837-DDAE-4686-9A2C-546EB82ECD5E}" dt="2026-04-16T11:11:17.068" v="743" actId="313"/>
         <pc:sldMkLst>
           <pc:docMk/>
           <pc:sldMk cId="1978588236" sldId="258"/>
         </pc:sldMkLst>
+        <pc:spChg chg="mod">
+          <ac:chgData name="Riabchynskyi Mykyta" userId="a582416d15533f1d" providerId="LiveId" clId="{13F68837-DDAE-4686-9A2C-546EB82ECD5E}" dt="2026-04-16T11:11:17.068" v="743" actId="313"/>
+          <ac:spMkLst>
+            <pc:docMk/>
+            <pc:sldMk cId="1978588236" sldId="258"/>
+            <ac:spMk id="2" creationId="{2816A02E-0C2E-4289-8212-B79CC832FB14}"/>
+          </ac:spMkLst>
+        </pc:spChg>
         <pc:spChg chg="mod">
           <ac:chgData name="Riabchynskyi Mykyta" userId="a582416d15533f1d" providerId="LiveId" clId="{13F68837-DDAE-4686-9A2C-546EB82ECD5E}" dt="2026-04-16T10:44:28.793" v="108" actId="20577"/>
           <ac:spMkLst>
@@ -3444,11 +3457,7 @@
             <a:pPr algn="ctr"/>
             <a:r>
               <a:rPr lang="de-DE" dirty="0"/>
-              <a:t>Data </a:t>
-            </a:r>
-            <a:r>
-              <a:rPr lang="de-DE" dirty="0" err="1"/>
-              <a:t>sources</a:t>
+              <a:t>Data Sources</a:t>
             </a:r>
             <a:endParaRPr lang="uk-UA" dirty="0"/>
           </a:p>
@@ -4906,13 +4915,8 @@
           <a:p>
             <a:r>
               <a:rPr lang="en-US" sz="1800" dirty="0"/>
-              <a:t>You can implement “data-check” or “self-check” using some open </a:t>
-            </a:r>
-            <a:r>
-              <a:rPr lang="en-US" sz="1800"/>
-              <a:t>source thesis</a:t>
-            </a:r>
-            <a:endParaRPr lang="en-US" sz="1800" dirty="0"/>
+              <a:t>You can implement “data-check” or “self-check” using some open source thesis</a:t>
+            </a:r>
           </a:p>
           <a:p>
             <a:pPr marL="0" indent="0">
